--- a/04_Comax/04_Comax_Corrige_CR_Moteur_Energetique.pptx
+++ b/04_Comax/04_Comax_Corrige_CR_Moteur_Energetique.pptx
@@ -209,7 +209,7 @@
           <a:p>
             <a:fld id="{92D8032B-AC11-4202-8B10-51B6F4F5AA4B}" type="datetimeFigureOut">
               <a:rPr lang="fr-FR" smtClean="0"/>
-              <a:t>12/01/2026</a:t>
+              <a:t>23/01/2026</a:t>
             </a:fld>
             <a:endParaRPr lang="fr-FR"/>
           </a:p>
@@ -721,7 +721,7 @@
           <a:p>
             <a:fld id="{D7F135F6-2A09-4FDD-9ECA-096E230CA0FA}" type="datetimeFigureOut">
               <a:rPr lang="fr-FR" smtClean="0"/>
-              <a:t>12/01/2026</a:t>
+              <a:t>23/01/2026</a:t>
             </a:fld>
             <a:endParaRPr lang="fr-FR"/>
           </a:p>
@@ -959,7 +959,7 @@
           <a:p>
             <a:fld id="{D7F135F6-2A09-4FDD-9ECA-096E230CA0FA}" type="datetimeFigureOut">
               <a:rPr lang="fr-FR" smtClean="0"/>
-              <a:t>12/01/2026</a:t>
+              <a:t>23/01/2026</a:t>
             </a:fld>
             <a:endParaRPr lang="fr-FR"/>
           </a:p>
@@ -1197,7 +1197,7 @@
           <a:p>
             <a:fld id="{D7F135F6-2A09-4FDD-9ECA-096E230CA0FA}" type="datetimeFigureOut">
               <a:rPr lang="fr-FR" smtClean="0"/>
-              <a:t>12/01/2026</a:t>
+              <a:t>23/01/2026</a:t>
             </a:fld>
             <a:endParaRPr lang="fr-FR"/>
           </a:p>
@@ -1435,7 +1435,7 @@
           <a:p>
             <a:fld id="{D7F135F6-2A09-4FDD-9ECA-096E230CA0FA}" type="datetimeFigureOut">
               <a:rPr lang="fr-FR" smtClean="0"/>
-              <a:t>12/01/2026</a:t>
+              <a:t>23/01/2026</a:t>
             </a:fld>
             <a:endParaRPr lang="fr-FR"/>
           </a:p>
@@ -1756,7 +1756,7 @@
           <a:p>
             <a:fld id="{D7F135F6-2A09-4FDD-9ECA-096E230CA0FA}" type="datetimeFigureOut">
               <a:rPr lang="fr-FR" smtClean="0"/>
-              <a:t>12/01/2026</a:t>
+              <a:t>23/01/2026</a:t>
             </a:fld>
             <a:endParaRPr lang="fr-FR"/>
           </a:p>
@@ -2059,7 +2059,7 @@
           <a:p>
             <a:fld id="{D7F135F6-2A09-4FDD-9ECA-096E230CA0FA}" type="datetimeFigureOut">
               <a:rPr lang="fr-FR" smtClean="0"/>
-              <a:t>12/01/2026</a:t>
+              <a:t>23/01/2026</a:t>
             </a:fld>
             <a:endParaRPr lang="fr-FR"/>
           </a:p>
@@ -2510,7 +2510,7 @@
           <a:p>
             <a:fld id="{D7F135F6-2A09-4FDD-9ECA-096E230CA0FA}" type="datetimeFigureOut">
               <a:rPr lang="fr-FR" smtClean="0"/>
-              <a:t>12/01/2026</a:t>
+              <a:t>23/01/2026</a:t>
             </a:fld>
             <a:endParaRPr lang="fr-FR"/>
           </a:p>
@@ -2683,7 +2683,7 @@
           <a:p>
             <a:fld id="{D7F135F6-2A09-4FDD-9ECA-096E230CA0FA}" type="datetimeFigureOut">
               <a:rPr lang="fr-FR" smtClean="0"/>
-              <a:t>12/01/2026</a:t>
+              <a:t>23/01/2026</a:t>
             </a:fld>
             <a:endParaRPr lang="fr-FR"/>
           </a:p>
@@ -2820,7 +2820,7 @@
           <a:p>
             <a:fld id="{D7F135F6-2A09-4FDD-9ECA-096E230CA0FA}" type="datetimeFigureOut">
               <a:rPr lang="fr-FR" smtClean="0"/>
-              <a:t>12/01/2026</a:t>
+              <a:t>23/01/2026</a:t>
             </a:fld>
             <a:endParaRPr lang="fr-FR"/>
           </a:p>
@@ -3164,7 +3164,7 @@
           <a:p>
             <a:fld id="{D7F135F6-2A09-4FDD-9ECA-096E230CA0FA}" type="datetimeFigureOut">
               <a:rPr lang="fr-FR" smtClean="0"/>
-              <a:t>12/01/2026</a:t>
+              <a:t>23/01/2026</a:t>
             </a:fld>
             <a:endParaRPr lang="fr-FR"/>
           </a:p>
@@ -3485,7 +3485,7 @@
           <a:p>
             <a:fld id="{D7F135F6-2A09-4FDD-9ECA-096E230CA0FA}" type="datetimeFigureOut">
               <a:rPr lang="fr-FR" smtClean="0"/>
-              <a:t>12/01/2026</a:t>
+              <a:t>23/01/2026</a:t>
             </a:fld>
             <a:endParaRPr lang="fr-FR"/>
           </a:p>
@@ -7306,8 +7306,8 @@
             </a:p>
           </p:txBody>
         </p:sp>
-        <mc:AlternateContent xmlns:mc="http://schemas.openxmlformats.org/markup-compatibility/2006" xmlns:a14="http://schemas.microsoft.com/office/drawing/2010/main">
-          <mc:Choice Requires="a14">
+        <mc:AlternateContent xmlns:mc="http://schemas.openxmlformats.org/markup-compatibility/2006">
+          <mc:Choice xmlns:a14="http://schemas.microsoft.com/office/drawing/2010/main" Requires="a14">
             <p:sp>
               <p:nvSpPr>
                 <p:cNvPr id="101" name="ZoneTexte 100">
@@ -7482,6 +7482,40 @@
                         </a:rPr>
                         <m:t>=</m:t>
                       </m:r>
+                      <m:sSub>
+                        <m:sSubPr>
+                          <m:ctrlPr>
+                            <a:rPr lang="fr-FR" sz="1100" b="0" i="1" smtClean="0">
+                              <a:solidFill>
+                                <a:schemeClr val="tx1"/>
+                              </a:solidFill>
+                              <a:latin typeface="Cambria Math" panose="02040503050406030204" pitchFamily="18" charset="0"/>
+                            </a:rPr>
+                          </m:ctrlPr>
+                        </m:sSubPr>
+                        <m:e>
+                          <m:r>
+                            <a:rPr lang="fr-FR" sz="1100" b="0" i="1" smtClean="0">
+                              <a:solidFill>
+                                <a:schemeClr val="tx1"/>
+                              </a:solidFill>
+                              <a:latin typeface="Cambria Math" panose="02040503050406030204" pitchFamily="18" charset="0"/>
+                            </a:rPr>
+                            <m:t>𝑘</m:t>
+                          </m:r>
+                        </m:e>
+                        <m:sub>
+                          <m:r>
+                            <a:rPr lang="fr-FR" sz="1100" b="0" i="1" smtClean="0">
+                              <a:solidFill>
+                                <a:schemeClr val="tx1"/>
+                              </a:solidFill>
+                              <a:latin typeface="Cambria Math" panose="02040503050406030204" pitchFamily="18" charset="0"/>
+                            </a:rPr>
+                            <m:t>𝑐</m:t>
+                          </m:r>
+                        </m:sub>
+                      </m:sSub>
                       <m:r>
                         <a:rPr lang="fr-FR" sz="1100" b="0" i="1" smtClean="0">
                           <a:solidFill>
@@ -7489,7 +7523,7 @@
                           </a:solidFill>
                           <a:latin typeface="Cambria Math" panose="02040503050406030204" pitchFamily="18" charset="0"/>
                         </a:rPr>
-                        <m:t>𝑘𝑖</m:t>
+                        <m:t>𝑖</m:t>
                       </m:r>
                     </m:oMath>
                   </a14:m>
@@ -7503,15 +7537,40 @@
                   </a:r>
                   <a14:m>
                     <m:oMath xmlns:m="http://schemas.openxmlformats.org/officeDocument/2006/math">
-                      <m:r>
-                        <a:rPr lang="fr-FR" sz="1100" b="0" i="1" dirty="0" smtClean="0">
-                          <a:solidFill>
-                            <a:schemeClr val="tx1"/>
-                          </a:solidFill>
-                          <a:latin typeface="Cambria Math" panose="02040503050406030204" pitchFamily="18" charset="0"/>
-                        </a:rPr>
-                        <m:t>𝑘</m:t>
-                      </m:r>
+                      <m:sSub>
+                        <m:sSubPr>
+                          <m:ctrlPr>
+                            <a:rPr lang="fr-FR" sz="1100" b="0" i="1" dirty="0" smtClean="0">
+                              <a:solidFill>
+                                <a:schemeClr val="tx1"/>
+                              </a:solidFill>
+                              <a:latin typeface="Cambria Math" panose="02040503050406030204" pitchFamily="18" charset="0"/>
+                            </a:rPr>
+                          </m:ctrlPr>
+                        </m:sSubPr>
+                        <m:e>
+                          <m:r>
+                            <a:rPr lang="fr-FR" sz="1100" b="0" i="1" dirty="0" smtClean="0">
+                              <a:solidFill>
+                                <a:schemeClr val="tx1"/>
+                              </a:solidFill>
+                              <a:latin typeface="Cambria Math" panose="02040503050406030204" pitchFamily="18" charset="0"/>
+                            </a:rPr>
+                            <m:t>𝑘</m:t>
+                          </m:r>
+                        </m:e>
+                        <m:sub>
+                          <m:r>
+                            <a:rPr lang="fr-FR" sz="1100" b="0" i="1" dirty="0" smtClean="0">
+                              <a:solidFill>
+                                <a:schemeClr val="tx1"/>
+                              </a:solidFill>
+                              <a:latin typeface="Cambria Math" panose="02040503050406030204" pitchFamily="18" charset="0"/>
+                            </a:rPr>
+                            <m:t>𝑐</m:t>
+                          </m:r>
+                        </m:sub>
+                      </m:sSub>
                     </m:oMath>
                   </a14:m>
                   <a:r>
@@ -8313,7 +8372,7 @@
               </p:txBody>
             </p:sp>
           </mc:Choice>
-          <mc:Fallback xmlns="">
+          <mc:Fallback>
             <p:sp>
               <p:nvSpPr>
                 <p:cNvPr id="101" name="ZoneTexte 100">
